--- a/catalog/samples/calc_flow.pptx
+++ b/catalog/samples/calc_flow.pptx
@@ -1962,7 +1962,7 @@
           </a:p>
           <a:p>
             <a:r>
-              <a:t>  "template_sha256": "27deced329fda9ac46efcfe498fdd773f9ca6c42a87f5a3e786a8b3fa87c8249"</a:t>
+              <a:t>  "template_sha256": "68a4b05a47fb6041c470dabdbab168bfea0c6bcb87c9f1317c502249d7a25490"</a:t>
             </a:r>
           </a:p>
           <a:p>
